--- a/docs/poster/variants/v05.pptx
+++ b/docs/poster/variants/v05.pptx
@@ -3503,6 +3503,90 @@
               </a:spcAft>
             </a:pPr>
             <a:r>
+              <a:rPr sz="6200" b="1">
+                <a:solidFill>
+                  <a:srgbClr val="1C6FB5"/>
+                </a:solidFill>
+                <a:latin typeface="Arial"/>
+              </a:rPr>
+              <a:t>1,389</a:t>
+            </a:r>
+          </a:p>
+        </p:txBody>
+      </p:sp>
+      <p:sp>
+        <p:nvSpPr>
+          <p:cNvPr id="12" name="TextBox 11"/>
+          <p:cNvSpPr txBox="1"/>
+          <p:nvPr/>
+        </p:nvSpPr>
+        <p:spPr>
+          <a:xfrm>
+            <a:off x="731520" y="9653270"/>
+            <a:ext cx="10607040" cy="365760"/>
+          </a:xfrm>
+          <a:prstGeom prst="rect">
+            <a:avLst/>
+          </a:prstGeom>
+          <a:noFill/>
+        </p:spPr>
+        <p:txBody>
+          <a:bodyPr wrap="square" lIns="0" rIns="0" tIns="0" bIns="0">
+            <a:spAutoFit/>
+          </a:bodyPr>
+          <a:lstStyle/>
+          <a:p>
+            <a:pPr algn="l">
+              <a:lnSpc>
+                <a:spcPct val="122000"/>
+              </a:lnSpc>
+              <a:spcAft>
+                <a:spcPts val="600"/>
+              </a:spcAft>
+            </a:pPr>
+            <a:r>
+              <a:rPr sz="1500" b="0">
+                <a:solidFill>
+                  <a:srgbClr val="556575"/>
+                </a:solidFill>
+                <a:latin typeface="Arial"/>
+              </a:rPr>
+              <a:t>joystick commands through the platform</a:t>
+            </a:r>
+          </a:p>
+        </p:txBody>
+      </p:sp>
+      <p:sp>
+        <p:nvSpPr>
+          <p:cNvPr id="13" name="TextBox 12"/>
+          <p:cNvSpPr txBox="1"/>
+          <p:nvPr/>
+        </p:nvSpPr>
+        <p:spPr>
+          <a:xfrm>
+            <a:off x="731520" y="10108184"/>
+            <a:ext cx="10607040" cy="365760"/>
+          </a:xfrm>
+          <a:prstGeom prst="rect">
+            <a:avLst/>
+          </a:prstGeom>
+          <a:noFill/>
+        </p:spPr>
+        <p:txBody>
+          <a:bodyPr wrap="square" lIns="0" rIns="0" tIns="0" bIns="0">
+            <a:spAutoFit/>
+          </a:bodyPr>
+          <a:lstStyle/>
+          <a:p>
+            <a:pPr algn="l">
+              <a:lnSpc>
+                <a:spcPct val="95000"/>
+              </a:lnSpc>
+              <a:spcAft>
+                <a:spcPts val="0"/>
+              </a:spcAft>
+            </a:pPr>
+            <a:r>
               <a:rPr sz="3200" b="1">
                 <a:solidFill>
                   <a:srgbClr val="14314E"/>
@@ -3516,13 +3600,13 @@
       </p:sp>
       <p:sp>
         <p:nvSpPr>
-          <p:cNvPr id="12" name="Rectangle 11"/>
+          <p:cNvPr id="14" name="Rectangle 13"/>
           <p:cNvSpPr/>
           <p:nvPr/>
         </p:nvSpPr>
         <p:spPr>
           <a:xfrm>
-            <a:off x="731520" y="9378442"/>
+            <a:off x="731520" y="10636504"/>
             <a:ext cx="10607040" cy="27432"/>
           </a:xfrm>
           <a:prstGeom prst="rect">
@@ -3560,13 +3644,13 @@
       </p:sp>
       <p:sp>
         <p:nvSpPr>
-          <p:cNvPr id="13" name="TextBox 12"/>
+          <p:cNvPr id="15" name="TextBox 14"/>
           <p:cNvSpPr txBox="1"/>
           <p:nvPr/>
         </p:nvSpPr>
         <p:spPr>
           <a:xfrm>
-            <a:off x="731520" y="9707626"/>
+            <a:off x="731520" y="10965688"/>
             <a:ext cx="10607040" cy="365760"/>
           </a:xfrm>
           <a:prstGeom prst="rect">
@@ -3602,13 +3686,13 @@
       </p:sp>
       <p:sp>
         <p:nvSpPr>
-          <p:cNvPr id="14" name="TextBox 13"/>
+          <p:cNvPr id="16" name="TextBox 15"/>
           <p:cNvSpPr txBox="1"/>
           <p:nvPr/>
         </p:nvSpPr>
         <p:spPr>
           <a:xfrm>
-            <a:off x="731520" y="11373866"/>
+            <a:off x="731520" y="12631928"/>
             <a:ext cx="10607040" cy="365760"/>
           </a:xfrm>
           <a:prstGeom prst="rect">
@@ -3644,13 +3728,13 @@
       </p:sp>
       <p:sp>
         <p:nvSpPr>
-          <p:cNvPr id="15" name="Rectangle 14"/>
+          <p:cNvPr id="17" name="Rectangle 16"/>
           <p:cNvSpPr/>
           <p:nvPr/>
         </p:nvSpPr>
         <p:spPr>
           <a:xfrm>
-            <a:off x="731520" y="11902186"/>
+            <a:off x="731520" y="13160248"/>
             <a:ext cx="10607040" cy="27432"/>
           </a:xfrm>
           <a:prstGeom prst="rect">
@@ -3688,7 +3772,7 @@
       </p:sp>
       <p:pic>
         <p:nvPicPr>
-          <p:cNvPr id="16" name="Picture 15" descr="l_robots.png"/>
+          <p:cNvPr id="18" name="Picture 17" descr="l_robots.png"/>
           <p:cNvPicPr>
             <a:picLocks noChangeAspect="1"/>
           </p:cNvPicPr>
@@ -3702,7 +3786,7 @@
         </p:blipFill>
         <p:spPr>
           <a:xfrm>
-            <a:off x="731520" y="12231370"/>
+            <a:off x="731520" y="13489431"/>
             <a:ext cx="10607040" cy="2377440"/>
           </a:xfrm>
           <a:prstGeom prst="rect">
@@ -3712,13 +3796,13 @@
       </p:pic>
       <p:sp>
         <p:nvSpPr>
-          <p:cNvPr id="17" name="TextBox 16"/>
+          <p:cNvPr id="19" name="TextBox 18"/>
           <p:cNvSpPr txBox="1"/>
           <p:nvPr/>
         </p:nvSpPr>
         <p:spPr>
           <a:xfrm>
-            <a:off x="731520" y="14718538"/>
+            <a:off x="731520" y="15976600"/>
             <a:ext cx="10607040" cy="365760"/>
           </a:xfrm>
           <a:prstGeom prst="rect">
@@ -3754,13 +3838,13 @@
       </p:sp>
       <p:sp>
         <p:nvSpPr>
-          <p:cNvPr id="18" name="TextBox 17"/>
+          <p:cNvPr id="20" name="TextBox 19"/>
           <p:cNvSpPr txBox="1"/>
           <p:nvPr/>
         </p:nvSpPr>
         <p:spPr>
           <a:xfrm>
-            <a:off x="731520" y="15928594"/>
+            <a:off x="731520" y="17186656"/>
             <a:ext cx="10607040" cy="365760"/>
           </a:xfrm>
           <a:prstGeom prst="rect">
@@ -3796,13 +3880,13 @@
       </p:sp>
       <p:sp>
         <p:nvSpPr>
-          <p:cNvPr id="19" name="TextBox 18"/>
+          <p:cNvPr id="21" name="TextBox 20"/>
           <p:cNvSpPr txBox="1"/>
           <p:nvPr/>
         </p:nvSpPr>
         <p:spPr>
           <a:xfrm>
-            <a:off x="731520" y="17300448"/>
+            <a:off x="731520" y="18558510"/>
             <a:ext cx="10607040" cy="365760"/>
           </a:xfrm>
           <a:prstGeom prst="rect">
@@ -3838,13 +3922,13 @@
       </p:sp>
       <p:sp>
         <p:nvSpPr>
-          <p:cNvPr id="20" name="Rectangle 19"/>
+          <p:cNvPr id="22" name="Rectangle 21"/>
           <p:cNvSpPr/>
           <p:nvPr/>
         </p:nvSpPr>
         <p:spPr>
           <a:xfrm>
-            <a:off x="731520" y="17828768"/>
+            <a:off x="731520" y="19086830"/>
             <a:ext cx="10607040" cy="27432"/>
           </a:xfrm>
           <a:prstGeom prst="rect">
@@ -3882,13 +3966,13 @@
       </p:sp>
       <p:sp>
         <p:nvSpPr>
-          <p:cNvPr id="21" name="TextBox 20"/>
+          <p:cNvPr id="23" name="TextBox 22"/>
           <p:cNvSpPr txBox="1"/>
           <p:nvPr/>
         </p:nvSpPr>
         <p:spPr>
           <a:xfrm>
-            <a:off x="731520" y="18157952"/>
+            <a:off x="731520" y="19416014"/>
             <a:ext cx="10607040" cy="365760"/>
           </a:xfrm>
           <a:prstGeom prst="rect">
@@ -3924,13 +4008,13 @@
       </p:sp>
       <p:sp>
         <p:nvSpPr>
-          <p:cNvPr id="22" name="TextBox 21"/>
+          <p:cNvPr id="24" name="TextBox 23"/>
           <p:cNvSpPr txBox="1"/>
           <p:nvPr/>
         </p:nvSpPr>
         <p:spPr>
           <a:xfrm>
-            <a:off x="731520" y="19824192"/>
+            <a:off x="731520" y="21082254"/>
             <a:ext cx="10607040" cy="365760"/>
           </a:xfrm>
           <a:prstGeom prst="rect">
@@ -3966,13 +4050,13 @@
       </p:sp>
       <p:sp>
         <p:nvSpPr>
-          <p:cNvPr id="23" name="Rectangle 22"/>
+          <p:cNvPr id="25" name="Rectangle 24"/>
           <p:cNvSpPr/>
           <p:nvPr/>
         </p:nvSpPr>
         <p:spPr>
           <a:xfrm>
-            <a:off x="731520" y="20352512"/>
+            <a:off x="731520" y="21610574"/>
             <a:ext cx="10607040" cy="27432"/>
           </a:xfrm>
           <a:prstGeom prst="rect">
@@ -4010,13 +4094,13 @@
       </p:sp>
       <p:sp>
         <p:nvSpPr>
-          <p:cNvPr id="24" name="TextBox 23"/>
+          <p:cNvPr id="26" name="TextBox 25"/>
           <p:cNvSpPr txBox="1"/>
           <p:nvPr/>
         </p:nvSpPr>
         <p:spPr>
           <a:xfrm>
-            <a:off x="731520" y="20681696"/>
+            <a:off x="731520" y="21939758"/>
             <a:ext cx="10607040" cy="365760"/>
           </a:xfrm>
           <a:prstGeom prst="rect">
@@ -4052,13 +4136,13 @@
       </p:sp>
       <p:sp>
         <p:nvSpPr>
-          <p:cNvPr id="25" name="TextBox 24"/>
+          <p:cNvPr id="27" name="TextBox 26"/>
           <p:cNvSpPr txBox="1"/>
           <p:nvPr/>
         </p:nvSpPr>
         <p:spPr>
           <a:xfrm>
-            <a:off x="731520" y="22347936"/>
+            <a:off x="731520" y="23605998"/>
             <a:ext cx="10607040" cy="365760"/>
           </a:xfrm>
           <a:prstGeom prst="rect">
@@ -4094,13 +4178,13 @@
       </p:sp>
       <p:sp>
         <p:nvSpPr>
-          <p:cNvPr id="26" name="Rectangle 25"/>
+          <p:cNvPr id="28" name="Rectangle 27"/>
           <p:cNvSpPr/>
           <p:nvPr/>
         </p:nvSpPr>
         <p:spPr>
           <a:xfrm>
-            <a:off x="731520" y="22876256"/>
+            <a:off x="731520" y="24134318"/>
             <a:ext cx="10607040" cy="27432"/>
           </a:xfrm>
           <a:prstGeom prst="rect">
@@ -4138,13 +4222,13 @@
       </p:sp>
       <p:sp>
         <p:nvSpPr>
-          <p:cNvPr id="27" name="TextBox 26"/>
+          <p:cNvPr id="29" name="TextBox 28"/>
           <p:cNvSpPr txBox="1"/>
           <p:nvPr/>
         </p:nvSpPr>
         <p:spPr>
           <a:xfrm>
-            <a:off x="731520" y="23205440"/>
+            <a:off x="731520" y="24463502"/>
             <a:ext cx="10607040" cy="365760"/>
           </a:xfrm>
           <a:prstGeom prst="rect">
@@ -4173,20 +4257,20 @@
                 </a:solidFill>
                 <a:latin typeface="Arial"/>
               </a:rPr>
-              <a:t>A new robot needs a project, an API key and a session start. The ingest contract is the same for every vehicle: start a session, post sensor batches and frames while driving, stop. The platform does not care what the robot is. The Unitree humanoid's project exists on this basis and is waiting on its first upload.</a:t>
-            </a:r>
-          </a:p>
-        </p:txBody>
-      </p:sp>
-      <p:sp>
-        <p:nvSpPr>
-          <p:cNvPr id="28" name="TextBox 27"/>
+              <a:t>A new robot needs a project, an API key and a session start. The ingest contract is the same for every vehicle: open a session, post sensor batches and frames while driving, stop. The platform does not care what the robot is. Empty projects for a mobile robot and a humanoid already sit on it, waiting for a first upload.</a:t>
+            </a:r>
+          </a:p>
+        </p:txBody>
+      </p:sp>
+      <p:sp>
+        <p:nvSpPr>
+          <p:cNvPr id="30" name="TextBox 29"/>
           <p:cNvSpPr txBox="1"/>
           <p:nvPr/>
         </p:nvSpPr>
         <p:spPr>
           <a:xfrm>
-            <a:off x="731520" y="24871680"/>
+            <a:off x="731520" y="26129742"/>
             <a:ext cx="10607040" cy="365760"/>
           </a:xfrm>
           <a:prstGeom prst="rect">
@@ -4222,13 +4306,13 @@
       </p:sp>
       <p:sp>
         <p:nvSpPr>
-          <p:cNvPr id="29" name="Rectangle 28"/>
+          <p:cNvPr id="31" name="Rectangle 30"/>
           <p:cNvSpPr/>
           <p:nvPr/>
         </p:nvSpPr>
         <p:spPr>
           <a:xfrm>
-            <a:off x="731520" y="25400000"/>
+            <a:off x="731520" y="26658062"/>
             <a:ext cx="10607040" cy="27432"/>
           </a:xfrm>
           <a:prstGeom prst="rect">
@@ -4266,13 +4350,13 @@
       </p:sp>
       <p:sp>
         <p:nvSpPr>
-          <p:cNvPr id="30" name="TextBox 29"/>
+          <p:cNvPr id="32" name="TextBox 31"/>
           <p:cNvSpPr txBox="1"/>
           <p:nvPr/>
         </p:nvSpPr>
         <p:spPr>
           <a:xfrm>
-            <a:off x="731520" y="25729184"/>
+            <a:off x="731520" y="26987246"/>
             <a:ext cx="10607040" cy="365760"/>
           </a:xfrm>
           <a:prstGeom prst="rect">
@@ -4308,7 +4392,7 @@
       </p:sp>
       <p:sp>
         <p:nvSpPr>
-          <p:cNvPr id="31" name="TextBox 30"/>
+          <p:cNvPr id="33" name="TextBox 32"/>
           <p:cNvSpPr txBox="1"/>
           <p:nvPr/>
         </p:nvSpPr>
@@ -4350,7 +4434,7 @@
       </p:sp>
       <p:sp>
         <p:nvSpPr>
-          <p:cNvPr id="32" name="Rectangle 31"/>
+          <p:cNvPr id="34" name="Rectangle 33"/>
           <p:cNvSpPr/>
           <p:nvPr/>
         </p:nvSpPr>
@@ -4394,7 +4478,7 @@
       </p:sp>
       <p:sp>
         <p:nvSpPr>
-          <p:cNvPr id="33" name="TextBox 32"/>
+          <p:cNvPr id="35" name="TextBox 34"/>
           <p:cNvSpPr txBox="1"/>
           <p:nvPr/>
         </p:nvSpPr>
@@ -4429,14 +4513,14 @@
                 </a:solidFill>
                 <a:latin typeface="Arial"/>
               </a:rPr>
-              <a:t>Robot 241 is a tracked rover that drives crop rows and streams camera, GPS and two IMUs. The laser cart carries the weeder: a galvanometer laser, a down camera over the work zone and a forward camera. A Unitree humanoid has a project and has uploaded nothing yet. Between them the two ground vehicles have recorded 2,686 frames in 26 drives.</a:t>
-            </a:r>
-          </a:p>
-        </p:txBody>
-      </p:sp>
-      <p:sp>
-        <p:nvSpPr>
-          <p:cNvPr id="34" name="TextBox 33"/>
+              <a:t>Robot 241 is a tracked rover that drives crop rows and streams camera, GPS and two IMUs. The laser cart carries the weeder: a galvanometer laser, a down camera over the work zone and a forward camera. Ten projects sit on the platform and two of them have a robot reporting into them. Between those two vehicles, 2,686 frames in 26 drives.</a:t>
+            </a:r>
+          </a:p>
+        </p:txBody>
+      </p:sp>
+      <p:sp>
+        <p:nvSpPr>
+          <p:cNvPr id="36" name="TextBox 35"/>
           <p:cNvSpPr txBox="1"/>
           <p:nvPr/>
         </p:nvSpPr>
@@ -4465,6 +4549,90 @@
               </a:spcAft>
             </a:pPr>
             <a:r>
+              <a:rPr sz="6200" b="1">
+                <a:solidFill>
+                  <a:srgbClr val="1C6FB5"/>
+                </a:solidFill>
+                <a:latin typeface="Arial"/>
+              </a:rPr>
+              <a:t>14</a:t>
+            </a:r>
+          </a:p>
+        </p:txBody>
+      </p:sp>
+      <p:sp>
+        <p:nvSpPr>
+          <p:cNvPr id="37" name="TextBox 36"/>
+          <p:cNvSpPr txBox="1"/>
+          <p:nvPr/>
+        </p:nvSpPr>
+        <p:spPr>
+          <a:xfrm>
+            <a:off x="11704320" y="9358884"/>
+            <a:ext cx="10607040" cy="365760"/>
+          </a:xfrm>
+          <a:prstGeom prst="rect">
+            <a:avLst/>
+          </a:prstGeom>
+          <a:noFill/>
+        </p:spPr>
+        <p:txBody>
+          <a:bodyPr wrap="square" lIns="0" rIns="0" tIns="0" bIns="0">
+            <a:spAutoFit/>
+          </a:bodyPr>
+          <a:lstStyle/>
+          <a:p>
+            <a:pPr algn="l">
+              <a:lnSpc>
+                <a:spcPct val="122000"/>
+              </a:lnSpc>
+              <a:spcAft>
+                <a:spcPts val="600"/>
+              </a:spcAft>
+            </a:pPr>
+            <a:r>
+              <a:rPr sz="1500" b="0">
+                <a:solidFill>
+                  <a:srgbClr val="556575"/>
+                </a:solidFill>
+                <a:latin typeface="Arial"/>
+              </a:rPr>
+              <a:t>analysis tools the planner can choose from</a:t>
+            </a:r>
+          </a:p>
+        </p:txBody>
+      </p:sp>
+      <p:sp>
+        <p:nvSpPr>
+          <p:cNvPr id="38" name="TextBox 37"/>
+          <p:cNvSpPr txBox="1"/>
+          <p:nvPr/>
+        </p:nvSpPr>
+        <p:spPr>
+          <a:xfrm>
+            <a:off x="11704320" y="9813798"/>
+            <a:ext cx="10607040" cy="365760"/>
+          </a:xfrm>
+          <a:prstGeom prst="rect">
+            <a:avLst/>
+          </a:prstGeom>
+          <a:noFill/>
+        </p:spPr>
+        <p:txBody>
+          <a:bodyPr wrap="square" lIns="0" rIns="0" tIns="0" bIns="0">
+            <a:spAutoFit/>
+          </a:bodyPr>
+          <a:lstStyle/>
+          <a:p>
+            <a:pPr algn="l">
+              <a:lnSpc>
+                <a:spcPct val="95000"/>
+              </a:lnSpc>
+              <a:spcAft>
+                <a:spcPts val="0"/>
+              </a:spcAft>
+            </a:pPr>
+            <a:r>
               <a:rPr sz="3200" b="1">
                 <a:solidFill>
                   <a:srgbClr val="14314E"/>
@@ -4478,13 +4646,13 @@
       </p:sp>
       <p:sp>
         <p:nvSpPr>
-          <p:cNvPr id="35" name="Rectangle 34"/>
+          <p:cNvPr id="39" name="Rectangle 38"/>
           <p:cNvSpPr/>
           <p:nvPr/>
         </p:nvSpPr>
         <p:spPr>
           <a:xfrm>
-            <a:off x="11704320" y="9084055"/>
+            <a:off x="11704320" y="10342118"/>
             <a:ext cx="10607040" cy="27432"/>
           </a:xfrm>
           <a:prstGeom prst="rect">
@@ -4522,13 +4690,13 @@
       </p:sp>
       <p:sp>
         <p:nvSpPr>
-          <p:cNvPr id="36" name="TextBox 35"/>
+          <p:cNvPr id="40" name="TextBox 39"/>
           <p:cNvSpPr txBox="1"/>
           <p:nvPr/>
         </p:nvSpPr>
         <p:spPr>
           <a:xfrm>
-            <a:off x="11704320" y="9413239"/>
+            <a:off x="11704320" y="10671302"/>
             <a:ext cx="10607040" cy="365760"/>
           </a:xfrm>
           <a:prstGeom prst="rect">
@@ -4564,13 +4732,13 @@
       </p:sp>
       <p:sp>
         <p:nvSpPr>
-          <p:cNvPr id="37" name="TextBox 36"/>
+          <p:cNvPr id="41" name="TextBox 40"/>
           <p:cNvSpPr txBox="1"/>
           <p:nvPr/>
         </p:nvSpPr>
         <p:spPr>
           <a:xfrm>
-            <a:off x="11704320" y="11079479"/>
+            <a:off x="11704320" y="12337542"/>
             <a:ext cx="10607040" cy="365760"/>
           </a:xfrm>
           <a:prstGeom prst="rect">
@@ -4606,13 +4774,13 @@
       </p:sp>
       <p:sp>
         <p:nvSpPr>
-          <p:cNvPr id="38" name="Rectangle 37"/>
+          <p:cNvPr id="42" name="Rectangle 41"/>
           <p:cNvSpPr/>
           <p:nvPr/>
         </p:nvSpPr>
         <p:spPr>
           <a:xfrm>
-            <a:off x="11704320" y="11607799"/>
+            <a:off x="11704320" y="12865862"/>
             <a:ext cx="10607040" cy="27432"/>
           </a:xfrm>
           <a:prstGeom prst="rect">
@@ -4650,13 +4818,13 @@
       </p:sp>
       <p:sp>
         <p:nvSpPr>
-          <p:cNvPr id="39" name="TextBox 38"/>
+          <p:cNvPr id="43" name="TextBox 42"/>
           <p:cNvSpPr txBox="1"/>
           <p:nvPr/>
         </p:nvSpPr>
         <p:spPr>
           <a:xfrm>
-            <a:off x="11704320" y="11936983"/>
+            <a:off x="11704320" y="13195045"/>
             <a:ext cx="10607040" cy="365760"/>
           </a:xfrm>
           <a:prstGeom prst="rect">
@@ -4692,13 +4860,13 @@
       </p:sp>
       <p:sp>
         <p:nvSpPr>
-          <p:cNvPr id="40" name="TextBox 39"/>
+          <p:cNvPr id="44" name="TextBox 43"/>
           <p:cNvSpPr txBox="1"/>
           <p:nvPr/>
         </p:nvSpPr>
         <p:spPr>
           <a:xfrm>
-            <a:off x="11704320" y="13308837"/>
+            <a:off x="11704320" y="14566899"/>
             <a:ext cx="10607040" cy="365760"/>
           </a:xfrm>
           <a:prstGeom prst="rect">
@@ -4721,6 +4889,90 @@
               </a:spcAft>
             </a:pPr>
             <a:r>
+              <a:rPr sz="6200" b="1">
+                <a:solidFill>
+                  <a:srgbClr val="1C6FB5"/>
+                </a:solidFill>
+                <a:latin typeface="Arial"/>
+              </a:rPr>
+              <a:t>92</a:t>
+            </a:r>
+          </a:p>
+        </p:txBody>
+      </p:sp>
+      <p:sp>
+        <p:nvSpPr>
+          <p:cNvPr id="45" name="TextBox 44"/>
+          <p:cNvSpPr txBox="1"/>
+          <p:nvPr/>
+        </p:nvSpPr>
+        <p:spPr>
+          <a:xfrm>
+            <a:off x="11704320" y="15370047"/>
+            <a:ext cx="10607040" cy="365760"/>
+          </a:xfrm>
+          <a:prstGeom prst="rect">
+            <a:avLst/>
+          </a:prstGeom>
+          <a:noFill/>
+        </p:spPr>
+        <p:txBody>
+          <a:bodyPr wrap="square" lIns="0" rIns="0" tIns="0" bIns="0">
+            <a:spAutoFit/>
+          </a:bodyPr>
+          <a:lstStyle/>
+          <a:p>
+            <a:pPr algn="l">
+              <a:lnSpc>
+                <a:spcPct val="122000"/>
+              </a:lnSpc>
+              <a:spcAft>
+                <a:spcPts val="600"/>
+              </a:spcAft>
+            </a:pPr>
+            <a:r>
+              <a:rPr sz="1500" b="0">
+                <a:solidFill>
+                  <a:srgbClr val="556575"/>
+                </a:solidFill>
+                <a:latin typeface="Arial"/>
+              </a:rPr>
+              <a:t>questions asked of a dataset so far</a:t>
+            </a:r>
+          </a:p>
+        </p:txBody>
+      </p:sp>
+      <p:sp>
+        <p:nvSpPr>
+          <p:cNvPr id="46" name="TextBox 45"/>
+          <p:cNvSpPr txBox="1"/>
+          <p:nvPr/>
+        </p:nvSpPr>
+        <p:spPr>
+          <a:xfrm>
+            <a:off x="11704320" y="15824961"/>
+            <a:ext cx="10607040" cy="365760"/>
+          </a:xfrm>
+          <a:prstGeom prst="rect">
+            <a:avLst/>
+          </a:prstGeom>
+          <a:noFill/>
+        </p:spPr>
+        <p:txBody>
+          <a:bodyPr wrap="square" lIns="0" rIns="0" tIns="0" bIns="0">
+            <a:spAutoFit/>
+          </a:bodyPr>
+          <a:lstStyle/>
+          <a:p>
+            <a:pPr algn="l">
+              <a:lnSpc>
+                <a:spcPct val="95000"/>
+              </a:lnSpc>
+              <a:spcAft>
+                <a:spcPts val="0"/>
+              </a:spcAft>
+            </a:pPr>
+            <a:r>
               <a:rPr sz="3200" b="1">
                 <a:solidFill>
                   <a:srgbClr val="14314E"/>
@@ -4734,13 +4986,13 @@
       </p:sp>
       <p:sp>
         <p:nvSpPr>
-          <p:cNvPr id="41" name="Rectangle 40"/>
+          <p:cNvPr id="47" name="Rectangle 46"/>
           <p:cNvSpPr/>
           <p:nvPr/>
         </p:nvSpPr>
         <p:spPr>
           <a:xfrm>
-            <a:off x="11704320" y="13837157"/>
+            <a:off x="11704320" y="16353281"/>
             <a:ext cx="10607040" cy="27432"/>
           </a:xfrm>
           <a:prstGeom prst="rect">
@@ -4778,13 +5030,13 @@
       </p:sp>
       <p:sp>
         <p:nvSpPr>
-          <p:cNvPr id="42" name="TextBox 41"/>
+          <p:cNvPr id="48" name="TextBox 47"/>
           <p:cNvSpPr txBox="1"/>
           <p:nvPr/>
         </p:nvSpPr>
         <p:spPr>
           <a:xfrm>
-            <a:off x="11704320" y="14166341"/>
+            <a:off x="11704320" y="16682465"/>
             <a:ext cx="10607040" cy="365760"/>
           </a:xfrm>
           <a:prstGeom prst="rect">
@@ -4820,13 +5072,13 @@
       </p:sp>
       <p:sp>
         <p:nvSpPr>
-          <p:cNvPr id="43" name="TextBox 42"/>
+          <p:cNvPr id="49" name="TextBox 48"/>
           <p:cNvSpPr txBox="1"/>
           <p:nvPr/>
         </p:nvSpPr>
         <p:spPr>
           <a:xfrm>
-            <a:off x="11704320" y="15832581"/>
+            <a:off x="11704320" y="18348706"/>
             <a:ext cx="10607040" cy="365760"/>
           </a:xfrm>
           <a:prstGeom prst="rect">
@@ -4862,13 +5114,13 @@
       </p:sp>
       <p:sp>
         <p:nvSpPr>
-          <p:cNvPr id="44" name="Rectangle 43"/>
+          <p:cNvPr id="50" name="Rectangle 49"/>
           <p:cNvSpPr/>
           <p:nvPr/>
         </p:nvSpPr>
         <p:spPr>
           <a:xfrm>
-            <a:off x="11704320" y="16360901"/>
+            <a:off x="11704320" y="18877026"/>
             <a:ext cx="10607040" cy="27432"/>
           </a:xfrm>
           <a:prstGeom prst="rect">
@@ -4906,13 +5158,13 @@
       </p:sp>
       <p:sp>
         <p:nvSpPr>
-          <p:cNvPr id="45" name="TextBox 44"/>
+          <p:cNvPr id="51" name="TextBox 50"/>
           <p:cNvSpPr txBox="1"/>
           <p:nvPr/>
         </p:nvSpPr>
         <p:spPr>
           <a:xfrm>
-            <a:off x="11704320" y="16690085"/>
+            <a:off x="11704320" y="19206210"/>
             <a:ext cx="10607040" cy="365760"/>
           </a:xfrm>
           <a:prstGeom prst="rect">
@@ -4948,13 +5200,13 @@
       </p:sp>
       <p:sp>
         <p:nvSpPr>
-          <p:cNvPr id="46" name="TextBox 45"/>
+          <p:cNvPr id="52" name="TextBox 51"/>
           <p:cNvSpPr txBox="1"/>
           <p:nvPr/>
         </p:nvSpPr>
         <p:spPr>
           <a:xfrm>
-            <a:off x="11704320" y="18356325"/>
+            <a:off x="11704320" y="20872450"/>
             <a:ext cx="10607040" cy="365760"/>
           </a:xfrm>
           <a:prstGeom prst="rect">
@@ -4990,13 +5242,13 @@
       </p:sp>
       <p:sp>
         <p:nvSpPr>
-          <p:cNvPr id="47" name="Rectangle 46"/>
+          <p:cNvPr id="53" name="Rectangle 52"/>
           <p:cNvSpPr/>
           <p:nvPr/>
         </p:nvSpPr>
         <p:spPr>
           <a:xfrm>
-            <a:off x="11704320" y="18884645"/>
+            <a:off x="11704320" y="21400770"/>
             <a:ext cx="10607040" cy="27432"/>
           </a:xfrm>
           <a:prstGeom prst="rect">
@@ -5034,7 +5286,7 @@
       </p:sp>
       <p:pic>
         <p:nvPicPr>
-          <p:cNvPr id="48" name="Picture 47" descr="h_drive.png"/>
+          <p:cNvPr id="54" name="Picture 53" descr="h_drive.png"/>
           <p:cNvPicPr>
             <a:picLocks noChangeAspect="1"/>
           </p:cNvPicPr>
@@ -5048,7 +5300,7 @@
         </p:blipFill>
         <p:spPr>
           <a:xfrm>
-            <a:off x="11704320" y="19213829"/>
+            <a:off x="11704320" y="21729954"/>
             <a:ext cx="10607040" cy="4023360"/>
           </a:xfrm>
           <a:prstGeom prst="rect">
@@ -5058,13 +5310,13 @@
       </p:pic>
       <p:sp>
         <p:nvSpPr>
-          <p:cNvPr id="49" name="TextBox 48"/>
+          <p:cNvPr id="55" name="TextBox 54"/>
           <p:cNvSpPr txBox="1"/>
           <p:nvPr/>
         </p:nvSpPr>
         <p:spPr>
           <a:xfrm>
-            <a:off x="11704320" y="23346917"/>
+            <a:off x="11704320" y="25863042"/>
             <a:ext cx="10607040" cy="365760"/>
           </a:xfrm>
           <a:prstGeom prst="rect">
@@ -5100,13 +5352,13 @@
       </p:sp>
       <p:sp>
         <p:nvSpPr>
-          <p:cNvPr id="50" name="TextBox 49"/>
+          <p:cNvPr id="56" name="TextBox 55"/>
           <p:cNvSpPr txBox="1"/>
           <p:nvPr/>
         </p:nvSpPr>
         <p:spPr>
           <a:xfrm>
-            <a:off x="11704320" y="24107393"/>
+            <a:off x="11704320" y="26623518"/>
             <a:ext cx="10607040" cy="365760"/>
           </a:xfrm>
           <a:prstGeom prst="rect">
@@ -5142,14 +5394,14 @@
       </p:sp>
       <p:sp>
         <p:nvSpPr>
-          <p:cNvPr id="51" name="TextBox 50"/>
+          <p:cNvPr id="57" name="TextBox 56"/>
           <p:cNvSpPr txBox="1"/>
           <p:nvPr/>
         </p:nvSpPr>
         <p:spPr>
           <a:xfrm>
-            <a:off x="11704320" y="25479247"/>
-            <a:ext cx="10607040" cy="365760"/>
+            <a:off x="22677120" y="6031992"/>
+            <a:ext cx="20482560" cy="365760"/>
           </a:xfrm>
           <a:prstGeom prst="rect">
             <a:avLst/>
@@ -5177,21 +5429,21 @@
                 </a:solidFill>
                 <a:latin typeface="Arial"/>
               </a:rPr>
-              <a:t>Reading the loop's own artifacts</a:t>
-            </a:r>
-          </a:p>
-        </p:txBody>
-      </p:sp>
-      <p:sp>
-        <p:nvSpPr>
-          <p:cNvPr id="52" name="Rectangle 51"/>
+              <a:t>A drive becomes a dataset as it opens</a:t>
+            </a:r>
+          </a:p>
+        </p:txBody>
+      </p:sp>
+      <p:sp>
+        <p:nvSpPr>
+          <p:cNvPr id="58" name="Rectangle 57"/>
           <p:cNvSpPr/>
           <p:nvPr/>
         </p:nvSpPr>
         <p:spPr>
           <a:xfrm>
-            <a:off x="11704320" y="26007568"/>
-            <a:ext cx="10607040" cy="27432"/>
+            <a:off x="22677120" y="6560312"/>
+            <a:ext cx="20482560" cy="27432"/>
           </a:xfrm>
           <a:prstGeom prst="rect">
             <a:avLst/>
@@ -5228,14 +5480,14 @@
       </p:sp>
       <p:sp>
         <p:nvSpPr>
-          <p:cNvPr id="53" name="TextBox 52"/>
+          <p:cNvPr id="59" name="TextBox 58"/>
           <p:cNvSpPr txBox="1"/>
           <p:nvPr/>
         </p:nvSpPr>
         <p:spPr>
           <a:xfrm>
-            <a:off x="11704320" y="26336751"/>
-            <a:ext cx="10607040" cy="365760"/>
+            <a:off x="22677120" y="6889496"/>
+            <a:ext cx="20482560" cy="365760"/>
           </a:xfrm>
           <a:prstGeom prst="rect">
             <a:avLst/>
@@ -5263,20 +5515,20 @@
                 </a:solidFill>
                 <a:latin typeface="Arial"/>
               </a:rPr>
-              <a:t>The corpus stopped growing at round three: the same 24 datasets and 48,752 unique images went in every time, and the apparent growth was one staging directory nobody cleared. Eight rounds collected nothing and reported success. Starting fresh instead of from the previous round's weights is worth +0.0287, 5.1 times this recipe's own seed spread.</a:t>
-            </a:r>
-          </a:p>
-        </p:txBody>
-      </p:sp>
-      <p:sp>
-        <p:nvSpPr>
-          <p:cNvPr id="54" name="TextBox 53"/>
+              <a:t>A vehicle opens a session and the platform registers it as a governed dataset at that moment, not after the drive ends. Frames and sensor batches arrive over one API key. Robot 241 sends camera, GPS and two IMUs; the laser cart sends camera, laser state, vehicle telemetry and its own detections, and no position at all.</a:t>
+            </a:r>
+          </a:p>
+        </p:txBody>
+      </p:sp>
+      <p:sp>
+        <p:nvSpPr>
+          <p:cNvPr id="60" name="TextBox 59"/>
           <p:cNvSpPr txBox="1"/>
           <p:nvPr/>
         </p:nvSpPr>
         <p:spPr>
           <a:xfrm>
-            <a:off x="22677120" y="6031992"/>
+            <a:off x="22677120" y="7966964"/>
             <a:ext cx="20482560" cy="365760"/>
           </a:xfrm>
           <a:prstGeom prst="rect">
@@ -5305,20 +5557,20 @@
                 </a:solidFill>
                 <a:latin typeface="Arial"/>
               </a:rPr>
-              <a:t>A drive becomes a dataset as it opens</a:t>
-            </a:r>
-          </a:p>
-        </p:txBody>
-      </p:sp>
-      <p:sp>
-        <p:nvSpPr>
-          <p:cNvPr id="55" name="Rectangle 54"/>
+              <a:t>Left alone for fifteen rounds</a:t>
+            </a:r>
+          </a:p>
+        </p:txBody>
+      </p:sp>
+      <p:sp>
+        <p:nvSpPr>
+          <p:cNvPr id="61" name="Rectangle 60"/>
           <p:cNvSpPr/>
           <p:nvPr/>
         </p:nvSpPr>
         <p:spPr>
           <a:xfrm>
-            <a:off x="22677120" y="6560312"/>
+            <a:off x="22677120" y="8495284"/>
             <a:ext cx="20482560" cy="27432"/>
           </a:xfrm>
           <a:prstGeom prst="rect">
@@ -5354,15 +5606,81 @@
           </a:p>
         </p:txBody>
       </p:sp>
-      <p:sp>
-        <p:nvSpPr>
-          <p:cNvPr id="56" name="TextBox 55"/>
+      <p:pic>
+        <p:nvPicPr>
+          <p:cNvPr id="62" name="Picture 61" descr="f_rounds.png"/>
+          <p:cNvPicPr>
+            <a:picLocks noChangeAspect="1"/>
+          </p:cNvPicPr>
+          <p:nvPr/>
+        </p:nvPicPr>
+        <p:blipFill>
+          <a:blip r:embed="rId4"/>
+          <a:stretch>
+            <a:fillRect/>
+          </a:stretch>
+        </p:blipFill>
+        <p:spPr>
+          <a:xfrm>
+            <a:off x="22677120" y="8824467"/>
+            <a:ext cx="20482560" cy="4663440"/>
+          </a:xfrm>
+          <a:prstGeom prst="rect">
+            <a:avLst/>
+          </a:prstGeom>
+        </p:spPr>
+      </p:pic>
+      <p:sp>
+        <p:nvSpPr>
+          <p:cNvPr id="63" name="TextBox 62"/>
           <p:cNvSpPr txBox="1"/>
           <p:nvPr/>
         </p:nvSpPr>
         <p:spPr>
           <a:xfrm>
-            <a:off x="22677120" y="6889496"/>
+            <a:off x="22677120" y="13597635"/>
+            <a:ext cx="20482560" cy="365760"/>
+          </a:xfrm>
+          <a:prstGeom prst="rect">
+            <a:avLst/>
+          </a:prstGeom>
+          <a:noFill/>
+        </p:spPr>
+        <p:txBody>
+          <a:bodyPr wrap="square" lIns="0" rIns="0" tIns="0" bIns="0">
+            <a:spAutoFit/>
+          </a:bodyPr>
+          <a:lstStyle/>
+          <a:p>
+            <a:pPr algn="l">
+              <a:lnSpc>
+                <a:spcPct val="118000"/>
+              </a:lnSpc>
+              <a:spcAft>
+                <a:spcPts val="0"/>
+              </a:spcAft>
+            </a:pPr>
+            <a:r>
+              <a:rPr sz="1500" b="0">
+                <a:solidFill>
+                  <a:srgbClr val="556575"/>
+                </a:solidFill>
+                <a:latin typeface="Arial"/>
+              </a:rPr>
+              <a:t>Figure 3.  (f) Fifteen unattended rounds on a fixed holdout. (g) Round 15's exact dataset, three ways. The first two marks differ only in the starting weights, so their gap is the warm-start chain; the third is the recipe the campaign ran, whose wall-clock cap truncates the cosine, with its three seeds drawn behind it. Sigma throughout is that recipe's own seed spread, 0.0040 over three seeds, propagated to the difference being quoted. Completing the schedule is not the fix -- the second mark sits below the third.</a:t>
+            </a:r>
+          </a:p>
+        </p:txBody>
+      </p:sp>
+      <p:sp>
+        <p:nvSpPr>
+          <p:cNvPr id="64" name="TextBox 63"/>
+          <p:cNvSpPr txBox="1"/>
+          <p:nvPr/>
+        </p:nvSpPr>
+        <p:spPr>
+          <a:xfrm>
+            <a:off x="22677120" y="14582901"/>
             <a:ext cx="20482560" cy="365760"/>
           </a:xfrm>
           <a:prstGeom prst="rect">
@@ -5391,20 +5709,20 @@
                 </a:solidFill>
                 <a:latin typeface="Arial"/>
               </a:rPr>
-              <a:t>A vehicle opens a session and the platform registers it as a governed dataset at that moment, not after the drive ends. Frames and sensor batches arrive over one API key. Robot 241 sends camera, GPS and two IMUs; the laser cart sends camera, laser state, vehicle telemetry and its own detections, and no position at all.</a:t>
-            </a:r>
-          </a:p>
-        </p:txBody>
-      </p:sp>
-      <p:sp>
-        <p:nvSpPr>
-          <p:cNvPr id="57" name="TextBox 56"/>
+              <a:t>Two cluster jobs, one collecting and one training, ran fifteen rounds against the locked registry with nobody in the room. Each round searched public sources, filtered what it found, merged, trained and evaluated. Every round reported success. Accuracy fell for fifteen rounds. This part is built and is switched off today.</a:t>
+            </a:r>
+          </a:p>
+        </p:txBody>
+      </p:sp>
+      <p:sp>
+        <p:nvSpPr>
+          <p:cNvPr id="65" name="TextBox 64"/>
           <p:cNvSpPr txBox="1"/>
           <p:nvPr/>
         </p:nvSpPr>
         <p:spPr>
           <a:xfrm>
-            <a:off x="22677120" y="7966964"/>
+            <a:off x="22677120" y="15660369"/>
             <a:ext cx="20482560" cy="365760"/>
           </a:xfrm>
           <a:prstGeom prst="rect">
@@ -5427,26 +5745,110 @@
               </a:spcAft>
             </a:pPr>
             <a:r>
-              <a:rPr sz="3200" b="1">
-                <a:solidFill>
-                  <a:srgbClr val="14314E"/>
+              <a:rPr sz="6200" b="1">
+                <a:solidFill>
+                  <a:srgbClr val="1C6FB5"/>
                 </a:solidFill>
                 <a:latin typeface="Arial"/>
               </a:rPr>
-              <a:t>Left alone for fifteen rounds</a:t>
-            </a:r>
-          </a:p>
-        </p:txBody>
-      </p:sp>
-      <p:sp>
-        <p:nvSpPr>
-          <p:cNvPr id="58" name="Rectangle 57"/>
+              <a:t>27</a:t>
+            </a:r>
+          </a:p>
+        </p:txBody>
+      </p:sp>
+      <p:sp>
+        <p:nvSpPr>
+          <p:cNvPr id="66" name="TextBox 65"/>
+          <p:cNvSpPr txBox="1"/>
+          <p:nvPr/>
+        </p:nvSpPr>
+        <p:spPr>
+          <a:xfrm>
+            <a:off x="22677120" y="16463517"/>
+            <a:ext cx="20482560" cy="365760"/>
+          </a:xfrm>
+          <a:prstGeom prst="rect">
+            <a:avLst/>
+          </a:prstGeom>
+          <a:noFill/>
+        </p:spPr>
+        <p:txBody>
+          <a:bodyPr wrap="square" lIns="0" rIns="0" tIns="0" bIns="0">
+            <a:spAutoFit/>
+          </a:bodyPr>
+          <a:lstStyle/>
+          <a:p>
+            <a:pPr algn="l">
+              <a:lnSpc>
+                <a:spcPct val="122000"/>
+              </a:lnSpc>
+              <a:spcAft>
+                <a:spcPts val="600"/>
+              </a:spcAft>
+            </a:pPr>
+            <a:r>
+              <a:rPr sz="1500" b="0">
+                <a:solidFill>
+                  <a:srgbClr val="556575"/>
+                </a:solidFill>
+                <a:latin typeface="Arial"/>
+              </a:rPr>
+              <a:t>distinct models trained, run, or rejected</a:t>
+            </a:r>
+          </a:p>
+        </p:txBody>
+      </p:sp>
+      <p:sp>
+        <p:nvSpPr>
+          <p:cNvPr id="67" name="TextBox 66"/>
+          <p:cNvSpPr txBox="1"/>
+          <p:nvPr/>
+        </p:nvSpPr>
+        <p:spPr>
+          <a:xfrm>
+            <a:off x="22677120" y="16918431"/>
+            <a:ext cx="20482560" cy="365760"/>
+          </a:xfrm>
+          <a:prstGeom prst="rect">
+            <a:avLst/>
+          </a:prstGeom>
+          <a:noFill/>
+        </p:spPr>
+        <p:txBody>
+          <a:bodyPr wrap="square" lIns="0" rIns="0" tIns="0" bIns="0">
+            <a:spAutoFit/>
+          </a:bodyPr>
+          <a:lstStyle/>
+          <a:p>
+            <a:pPr algn="l">
+              <a:lnSpc>
+                <a:spcPct val="95000"/>
+              </a:lnSpc>
+              <a:spcAft>
+                <a:spcPts val="0"/>
+              </a:spcAft>
+            </a:pPr>
+            <a:r>
+              <a:rPr sz="3200" b="1">
+                <a:solidFill>
+                  <a:srgbClr val="14314E"/>
+                </a:solidFill>
+                <a:latin typeface="Arial"/>
+              </a:rPr>
+              <a:t>Everything we trained, ran, or rejected</a:t>
+            </a:r>
+          </a:p>
+        </p:txBody>
+      </p:sp>
+      <p:sp>
+        <p:nvSpPr>
+          <p:cNvPr id="68" name="Rectangle 67"/>
           <p:cNvSpPr/>
           <p:nvPr/>
         </p:nvSpPr>
         <p:spPr>
           <a:xfrm>
-            <a:off x="22677120" y="8495284"/>
+            <a:off x="22677120" y="17446752"/>
             <a:ext cx="20482560" cy="27432"/>
           </a:xfrm>
           <a:prstGeom prst="rect">
@@ -5484,22 +5886,22 @@
       </p:sp>
       <p:pic>
         <p:nvPicPr>
-          <p:cNvPr id="59" name="Picture 58" descr="f_rounds.png"/>
+          <p:cNvPr id="69" name="Picture 68" descr="m_ledger.png"/>
           <p:cNvPicPr>
             <a:picLocks noChangeAspect="1"/>
           </p:cNvPicPr>
           <p:nvPr/>
         </p:nvPicPr>
         <p:blipFill>
-          <a:blip r:embed="rId4"/>
+          <a:blip r:embed="rId5"/>
           <a:stretch>
             <a:fillRect/>
           </a:stretch>
         </p:blipFill>
         <p:spPr>
           <a:xfrm>
-            <a:off x="22677120" y="8824467"/>
-            <a:ext cx="20482560" cy="4663440"/>
+            <a:off x="22677120" y="17775935"/>
+            <a:ext cx="20482560" cy="3749040"/>
           </a:xfrm>
           <a:prstGeom prst="rect">
             <a:avLst/>
@@ -5508,13 +5910,13 @@
       </p:pic>
       <p:sp>
         <p:nvSpPr>
-          <p:cNvPr id="60" name="TextBox 59"/>
+          <p:cNvPr id="70" name="TextBox 69"/>
           <p:cNvSpPr txBox="1"/>
           <p:nvPr/>
         </p:nvSpPr>
         <p:spPr>
           <a:xfrm>
-            <a:off x="22677120" y="13597635"/>
+            <a:off x="22677120" y="21634704"/>
             <a:ext cx="20482560" cy="365760"/>
           </a:xfrm>
           <a:prstGeom prst="rect">
@@ -5543,20 +5945,20 @@
                 </a:solidFill>
                 <a:latin typeface="Arial"/>
               </a:rPr>
-              <a:t>Figure 3.  (f) Fifteen unattended rounds on a fixed holdout. (g) Round 15's exact dataset, three ways. The first two marks differ only in the starting weights, so their gap is the warm-start chain; the third is the recipe the campaign ran, whose wall-clock cap truncates the cosine, with its three seeds drawn behind it. Sigma throughout is that recipe's own seed spread, 0.0040 over three seeds, propagated to the difference being quoted. Completing the schedule is not the fix -- the second mark sits below the third.</a:t>
-            </a:r>
-          </a:p>
-        </p:txBody>
-      </p:sp>
-      <p:sp>
-        <p:nvSpPr>
-          <p:cNvPr id="61" name="TextBox 60"/>
+              <a:t>Figure 4.  30 rows in four families, which is 27 distinct models: OWLv2-large and Qwen2.5-7B each appear twice because each does two jobs here. One model is deployed. The zero-shot column is a single deterministic pass per model with no repeats, scored as mAP50 on the 848-image split; the reviewer column is the 149-case dev split, and two of its arms are still running. RF-DETR's score is on a third scale and is never differenced against the rows above it: the one measured offset between two of our evaluators, 0.0239, is larger than the gap on display.</a:t>
+            </a:r>
+          </a:p>
+        </p:txBody>
+      </p:sp>
+      <p:sp>
+        <p:nvSpPr>
+          <p:cNvPr id="71" name="TextBox 70"/>
           <p:cNvSpPr txBox="1"/>
           <p:nvPr/>
         </p:nvSpPr>
         <p:spPr>
           <a:xfrm>
-            <a:off x="22677120" y="14582901"/>
+            <a:off x="22677120" y="22619970"/>
             <a:ext cx="20482560" cy="365760"/>
           </a:xfrm>
           <a:prstGeom prst="rect">
@@ -5585,20 +5987,20 @@
                 </a:solidFill>
                 <a:latin typeface="Arial"/>
               </a:rPr>
-              <a:t>Two cluster jobs, one collecting and one training, ran fifteen rounds against the locked registry with nobody in the room. Each round searched public sources, filtered what it found, merged, trained and evaluated. Every round reported success. Accuracy fell for fifteen rounds. This part is built and is switched off today.</a:t>
-            </a:r>
-          </a:p>
-        </p:txBody>
-      </p:sp>
-      <p:sp>
-        <p:nvSpPr>
-          <p:cNvPr id="62" name="TextBox 61"/>
+              <a:t>Thirty rows in four families, which is 27 distinct models. Five detectors trained on our own holdout, two vision models inside the loop, fourteen vision-language models zero-shot, and nine language models as reviewers. One is deployed.</a:t>
+            </a:r>
+          </a:p>
+        </p:txBody>
+      </p:sp>
+      <p:sp>
+        <p:nvSpPr>
+          <p:cNvPr id="72" name="TextBox 71"/>
           <p:cNvSpPr txBox="1"/>
           <p:nvPr/>
         </p:nvSpPr>
         <p:spPr>
           <a:xfrm>
-            <a:off x="22677120" y="15660369"/>
+            <a:off x="22677120" y="23697438"/>
             <a:ext cx="20482560" cy="365760"/>
           </a:xfrm>
           <a:prstGeom prst="rect">
@@ -5627,20 +6029,20 @@
                 </a:solidFill>
                 <a:latin typeface="Arial"/>
               </a:rPr>
-              <a:t>Everything we trained, ran, or rejected</a:t>
-            </a:r>
-          </a:p>
-        </p:txBody>
-      </p:sp>
-      <p:sp>
-        <p:nvSpPr>
-          <p:cNvPr id="63" name="Rectangle 62"/>
+              <a:t>Inside the platform</a:t>
+            </a:r>
+          </a:p>
+        </p:txBody>
+      </p:sp>
+      <p:sp>
+        <p:nvSpPr>
+          <p:cNvPr id="73" name="Rectangle 72"/>
           <p:cNvSpPr/>
           <p:nvPr/>
         </p:nvSpPr>
         <p:spPr>
           <a:xfrm>
-            <a:off x="22677120" y="16188690"/>
+            <a:off x="22677120" y="24225758"/>
             <a:ext cx="20482560" cy="27432"/>
           </a:xfrm>
           <a:prstGeom prst="rect">
@@ -5678,22 +6080,22 @@
       </p:sp>
       <p:pic>
         <p:nvPicPr>
-          <p:cNvPr id="64" name="Picture 63" descr="m_ledger.png"/>
+          <p:cNvPr id="74" name="Picture 73" descr="n_system.png"/>
           <p:cNvPicPr>
             <a:picLocks noChangeAspect="1"/>
           </p:cNvPicPr>
           <p:nvPr/>
         </p:nvPicPr>
         <p:blipFill>
-          <a:blip r:embed="rId5"/>
+          <a:blip r:embed="rId6"/>
           <a:stretch>
             <a:fillRect/>
           </a:stretch>
         </p:blipFill>
         <p:spPr>
           <a:xfrm>
-            <a:off x="22677120" y="16517873"/>
-            <a:ext cx="20482560" cy="3749040"/>
+            <a:off x="22677120" y="24554942"/>
+            <a:ext cx="20482560" cy="3383280"/>
           </a:xfrm>
           <a:prstGeom prst="rect">
             <a:avLst/>
@@ -5702,13 +6104,13 @@
       </p:pic>
       <p:sp>
         <p:nvSpPr>
-          <p:cNvPr id="65" name="TextBox 64"/>
+          <p:cNvPr id="75" name="TextBox 74"/>
           <p:cNvSpPr txBox="1"/>
           <p:nvPr/>
         </p:nvSpPr>
         <p:spPr>
           <a:xfrm>
-            <a:off x="22677120" y="20376642"/>
+            <a:off x="22677120" y="28047950"/>
             <a:ext cx="20482560" cy="365760"/>
           </a:xfrm>
           <a:prstGeom prst="rect">
@@ -5737,20 +6139,20 @@
                 </a:solidFill>
                 <a:latin typeface="Arial"/>
               </a:rPr>
-              <a:t>Figure 4.  30 rows in four families, which is 27 distinct models: OWLv2-large and Qwen2.5-7B each appear twice because each does two jobs here. One model is deployed. The zero-shot column is a single deterministic pass per model with no repeats, scored as mAP50 on the 848-image split; the reviewer column is the 149-case dev split, and two of its arms are still running. RF-DETR's score is on a third scale and is never differenced against the rows above it: the one measured offset between two of our evaluators, 0.0239, is larger than the gap on display.</a:t>
-            </a:r>
-          </a:p>
-        </p:txBody>
-      </p:sp>
-      <p:sp>
-        <p:nvSpPr>
-          <p:cNvPr id="66" name="TextBox 65"/>
+              <a:t>Figure 5.  The path as built, from a camera in a crop row to a checkpoint on the cluster. Every stage has run. Three qualifications ride on it. The collector and trainer are paused after a stop-loss on 2026-08-29. The supervisor is advisory and nothing it says is applied. And the last link is not closed: no robot frame has entered training, because none of them is labelled yet.</a:t>
+            </a:r>
+          </a:p>
+        </p:txBody>
+      </p:sp>
+      <p:sp>
+        <p:nvSpPr>
+          <p:cNvPr id="76" name="TextBox 75"/>
           <p:cNvSpPr txBox="1"/>
           <p:nvPr/>
         </p:nvSpPr>
         <p:spPr>
           <a:xfrm>
-            <a:off x="22677120" y="21361908"/>
+            <a:off x="22677120" y="28808426"/>
             <a:ext cx="20482560" cy="365760"/>
           </a:xfrm>
           <a:prstGeom prst="rect">
@@ -5779,69 +6181,27 @@
                 </a:solidFill>
                 <a:latin typeface="Arial"/>
               </a:rPr>
-              <a:t>Thirty rows in four families, which is 27 distinct models. Five detectors trained on our own holdout, two vision models inside the loop, fourteen vision-language models zero-shot, and nine language models as reviewers. One is deployed.</a:t>
-            </a:r>
-          </a:p>
-        </p:txBody>
-      </p:sp>
-      <p:sp>
-        <p:nvSpPr>
-          <p:cNvPr id="67" name="TextBox 66"/>
-          <p:cNvSpPr txBox="1"/>
-          <p:nvPr/>
-        </p:nvSpPr>
-        <p:spPr>
-          <a:xfrm>
-            <a:off x="22677120" y="22439376"/>
-            <a:ext cx="20482560" cy="365760"/>
-          </a:xfrm>
-          <a:prstGeom prst="rect">
-            <a:avLst/>
-          </a:prstGeom>
-          <a:noFill/>
-        </p:spPr>
-        <p:txBody>
-          <a:bodyPr wrap="square" lIns="0" rIns="0" tIns="0" bIns="0">
-            <a:spAutoFit/>
-          </a:bodyPr>
-          <a:lstStyle/>
-          <a:p>
-            <a:pPr algn="l">
-              <a:lnSpc>
-                <a:spcPct val="95000"/>
-              </a:lnSpc>
-              <a:spcAft>
-                <a:spcPts val="0"/>
-              </a:spcAft>
-            </a:pPr>
-            <a:r>
-              <a:rPr sz="3200" b="1">
-                <a:solidFill>
-                  <a:srgbClr val="14314E"/>
-                </a:solidFill>
-                <a:latin typeface="Arial"/>
-              </a:rPr>
-              <a:t>Inside the platform</a:t>
-            </a:r>
-          </a:p>
-        </p:txBody>
-      </p:sp>
-      <p:sp>
-        <p:nvSpPr>
-          <p:cNvPr id="68" name="Rectangle 67"/>
+              <a:t>Every stage from a camera in a crop row to a checkpoint on the cluster has run. The dashboard and registry run on a lab server; GPU jobs queue on PSC Bridges-2. The collector and trainer are paused after a stop-loss on 2026-08-29. The supervisor is advisory and nothing it says is applied.</a:t>
+            </a:r>
+          </a:p>
+        </p:txBody>
+      </p:sp>
+      <p:sp>
+        <p:nvSpPr>
+          <p:cNvPr id="77" name="Rectangle 76"/>
           <p:cNvSpPr/>
           <p:nvPr/>
         </p:nvSpPr>
         <p:spPr>
           <a:xfrm>
-            <a:off x="22677120" y="22967696"/>
-            <a:ext cx="20482560" cy="27432"/>
+            <a:off x="731520" y="30632400"/>
+            <a:ext cx="42428160" cy="20116"/>
           </a:xfrm>
           <a:prstGeom prst="rect">
             <a:avLst/>
           </a:prstGeom>
           <a:solidFill>
-            <a:srgbClr val="1C6FB5"/>
+            <a:srgbClr val="C2CEDA"/>
           </a:solidFill>
           <a:ln>
             <a:noFill/>
@@ -5870,161 +6230,9 @@
           </a:p>
         </p:txBody>
       </p:sp>
-      <p:pic>
-        <p:nvPicPr>
-          <p:cNvPr id="69" name="Picture 68" descr="n_system.png"/>
-          <p:cNvPicPr>
-            <a:picLocks noChangeAspect="1"/>
-          </p:cNvPicPr>
-          <p:nvPr/>
-        </p:nvPicPr>
-        <p:blipFill>
-          <a:blip r:embed="rId6"/>
-          <a:stretch>
-            <a:fillRect/>
-          </a:stretch>
-        </p:blipFill>
-        <p:spPr>
-          <a:xfrm>
-            <a:off x="22677120" y="23296880"/>
-            <a:ext cx="20482560" cy="3383280"/>
-          </a:xfrm>
-          <a:prstGeom prst="rect">
-            <a:avLst/>
-          </a:prstGeom>
-        </p:spPr>
-      </p:pic>
-      <p:sp>
-        <p:nvSpPr>
-          <p:cNvPr id="70" name="TextBox 69"/>
-          <p:cNvSpPr txBox="1"/>
-          <p:nvPr/>
-        </p:nvSpPr>
-        <p:spPr>
-          <a:xfrm>
-            <a:off x="22677120" y="26789888"/>
-            <a:ext cx="20482560" cy="365760"/>
-          </a:xfrm>
-          <a:prstGeom prst="rect">
-            <a:avLst/>
-          </a:prstGeom>
-          <a:noFill/>
-        </p:spPr>
-        <p:txBody>
-          <a:bodyPr wrap="square" lIns="0" rIns="0" tIns="0" bIns="0">
-            <a:spAutoFit/>
-          </a:bodyPr>
-          <a:lstStyle/>
-          <a:p>
-            <a:pPr algn="l">
-              <a:lnSpc>
-                <a:spcPct val="118000"/>
-              </a:lnSpc>
-              <a:spcAft>
-                <a:spcPts val="0"/>
-              </a:spcAft>
-            </a:pPr>
-            <a:r>
-              <a:rPr sz="1500" b="0">
-                <a:solidFill>
-                  <a:srgbClr val="556575"/>
-                </a:solidFill>
-                <a:latin typeface="Arial"/>
-              </a:rPr>
-              <a:t>Figure 5.  The path as built, from a camera in a crop row to a checkpoint on the cluster. Every stage has run. Three qualifications ride on it. The collector and trainer are paused after a stop-loss on 2026-08-29. The supervisor is advisory and nothing it says is applied. And the last link is not closed: no robot frame has entered training, because none of them is labelled yet.</a:t>
-            </a:r>
-          </a:p>
-        </p:txBody>
-      </p:sp>
-      <p:sp>
-        <p:nvSpPr>
-          <p:cNvPr id="71" name="TextBox 70"/>
-          <p:cNvSpPr txBox="1"/>
-          <p:nvPr/>
-        </p:nvSpPr>
-        <p:spPr>
-          <a:xfrm>
-            <a:off x="22677120" y="27550364"/>
-            <a:ext cx="20482560" cy="365760"/>
-          </a:xfrm>
-          <a:prstGeom prst="rect">
-            <a:avLst/>
-          </a:prstGeom>
-          <a:noFill/>
-        </p:spPr>
-        <p:txBody>
-          <a:bodyPr wrap="square" lIns="0" rIns="0" tIns="0" bIns="0">
-            <a:spAutoFit/>
-          </a:bodyPr>
-          <a:lstStyle/>
-          <a:p>
-            <a:pPr algn="l">
-              <a:lnSpc>
-                <a:spcPct val="122000"/>
-              </a:lnSpc>
-              <a:spcAft>
-                <a:spcPts val="1400"/>
-              </a:spcAft>
-            </a:pPr>
-            <a:r>
-              <a:rPr sz="1900" b="0">
-                <a:solidFill>
-                  <a:srgbClr val="1E293B"/>
-                </a:solidFill>
-                <a:latin typeface="Arial"/>
-              </a:rPr>
-              <a:t>Every stage from a camera in a crop row to a checkpoint on the cluster has run. The dashboard and registry run on a lab server; GPU jobs queue on PSC Bridges-2. The collector and trainer are paused after a stop-loss on 2026-08-29. The supervisor is advisory and nothing it says is applied.</a:t>
-            </a:r>
-          </a:p>
-        </p:txBody>
-      </p:sp>
-      <p:sp>
-        <p:nvSpPr>
-          <p:cNvPr id="72" name="Rectangle 71"/>
-          <p:cNvSpPr/>
-          <p:nvPr/>
-        </p:nvSpPr>
-        <p:spPr>
-          <a:xfrm>
-            <a:off x="731520" y="30632400"/>
-            <a:ext cx="42428160" cy="20116"/>
-          </a:xfrm>
-          <a:prstGeom prst="rect">
-            <a:avLst/>
-          </a:prstGeom>
-          <a:solidFill>
-            <a:srgbClr val="C2CEDA"/>
-          </a:solidFill>
-          <a:ln>
-            <a:noFill/>
-          </a:ln>
-          <a:effectLst/>
-        </p:spPr>
-        <p:style>
-          <a:lnRef idx="1">
-            <a:schemeClr val="accent1"/>
-          </a:lnRef>
-          <a:fillRef idx="3">
-            <a:schemeClr val="accent1"/>
-          </a:fillRef>
-          <a:effectRef idx="2">
-            <a:schemeClr val="accent1"/>
-          </a:effectRef>
-          <a:fontRef idx="minor">
-            <a:schemeClr val="lt1"/>
-          </a:fontRef>
-        </p:style>
-        <p:txBody>
-          <a:bodyPr rtlCol="0" anchor="ctr"/>
-          <a:lstStyle/>
-          <a:p>
-            <a:pPr algn="ctr"/>
-          </a:p>
-        </p:txBody>
-      </p:sp>
-      <p:sp>
-        <p:nvSpPr>
-          <p:cNvPr id="73" name="TextBox 72"/>
+      <p:sp>
+        <p:nvSpPr>
+          <p:cNvPr id="78" name="TextBox 77"/>
           <p:cNvSpPr txBox="1"/>
           <p:nvPr/>
         </p:nvSpPr>
@@ -6066,7 +6274,7 @@
       </p:sp>
       <p:sp>
         <p:nvSpPr>
-          <p:cNvPr id="74" name="TextBox 73"/>
+          <p:cNvPr id="79" name="TextBox 78"/>
           <p:cNvSpPr txBox="1"/>
           <p:nvPr/>
         </p:nvSpPr>
@@ -6108,7 +6316,7 @@
       </p:sp>
       <p:sp>
         <p:nvSpPr>
-          <p:cNvPr id="75" name="TextBox 74"/>
+          <p:cNvPr id="80" name="TextBox 79"/>
           <p:cNvSpPr txBox="1"/>
           <p:nvPr/>
         </p:nvSpPr>
